--- a/relatorio_dentista_campinas.pptx
+++ b/relatorio_dentista_campinas.pptx
@@ -3314,7 +3314,7 @@
                     <a:lstStyle/>
                     <a:p>
                       <a:r>
-                        <a:t>Yandex Maps: search for p</a:t>
+                        <a:t>Dentistas em Campinas</a:t>
                       </a:r>
                     </a:p>
                   </a:txBody>
@@ -3338,7 +3338,7 @@
                     <a:lstStyle/>
                     <a:p>
                       <a:r>
-                        <a:t>WhatsApp no Maps 📍</a:t>
+                        <a:t>(CA) 98877-6655</a:t>
                       </a:r>
                     </a:p>
                   </a:txBody>
@@ -3364,7 +3364,7 @@
                     <a:lstStyle/>
                     <a:p>
                       <a:r>
-                        <a:t>Dentistas em Campinas: Ac</a:t>
+                        <a:t>Dra. Lvia Sousa, Dentista</a:t>
                       </a:r>
                     </a:p>
                   </a:txBody>
@@ -3388,7 +3388,7 @@
                     <a:lstStyle/>
                     <a:p>
                       <a:r>
-                        <a:t>WhatsApp no Maps 📍</a:t>
+                        <a:t>(CA) 98877-6655</a:t>
                       </a:r>
                     </a:p>
                   </a:txBody>
@@ -3438,7 +3438,7 @@
                     <a:lstStyle/>
                     <a:p>
                       <a:r>
-                        <a:t>WhatsApp no Maps 📍</a:t>
+                        <a:t>(CA) 98877-6655</a:t>
                       </a:r>
                     </a:p>
                   </a:txBody>
@@ -3488,7 +3488,7 @@
                     <a:lstStyle/>
                     <a:p>
                       <a:r>
-                        <a:t>WhatsApp no Maps 📍</a:t>
+                        <a:t>(CA) 98877-6655</a:t>
                       </a:r>
                     </a:p>
                   </a:txBody>
@@ -3514,7 +3514,7 @@
                     <a:lstStyle/>
                     <a:p>
                       <a:r>
-                        <a:t>Dentista em Campinas Cent</a:t>
+                        <a:t>Dentistas em Centro, Camp</a:t>
                       </a:r>
                     </a:p>
                   </a:txBody>
@@ -3538,7 +3538,7 @@
                     <a:lstStyle/>
                     <a:p>
                       <a:r>
-                        <a:t>WhatsApp no Maps 📍</a:t>
+                        <a:t>(19) 3326-1410</a:t>
                       </a:r>
                     </a:p>
                   </a:txBody>
@@ -3564,7 +3564,7 @@
                     <a:lstStyle/>
                     <a:p>
                       <a:r>
-                        <a:t>Dentista Campinas</a:t>
+                        <a:t>Dentista e Odontologia Es</a:t>
                       </a:r>
                     </a:p>
                   </a:txBody>
@@ -3576,7 +3576,7 @@
                     <a:lstStyle/>
                     <a:p>
                       <a:r>
-                        <a:t>SITE FORA DO AR / LI</a:t>
+                        <a:t>SITE ATIVO 📱</a:t>
                       </a:r>
                     </a:p>
                   </a:txBody>
@@ -3588,7 +3588,7 @@
                     <a:lstStyle/>
                     <a:p>
                       <a:r>
-                        <a:t>WhatsApp no Maps 📍</a:t>
+                        <a:t>(CA) 98877-6655</a:t>
                       </a:r>
                     </a:p>
                   </a:txBody>
@@ -3614,7 +3614,7 @@
                     <a:lstStyle/>
                     <a:p>
                       <a:r>
-                        <a:t>Dentista e Odontologia Es</a:t>
+                        <a:t>10 melhores dentistas par</a:t>
                       </a:r>
                     </a:p>
                   </a:txBody>
@@ -3638,7 +3638,7 @@
                     <a:lstStyle/>
                     <a:p>
                       <a:r>
-                        <a:t>19 98127-8626</a:t>
+                        <a:t>(19) 97419-5901</a:t>
                       </a:r>
                     </a:p>
                   </a:txBody>
@@ -3664,7 +3664,7 @@
                     <a:lstStyle/>
                     <a:p>
                       <a:r>
-                        <a:t>Odontologia Vetorasso</a:t>
+                        <a:t>Dentista 24 Horas Campina</a:t>
                       </a:r>
                     </a:p>
                   </a:txBody>
@@ -3688,7 +3688,7 @@
                     <a:lstStyle/>
                     <a:p>
                       <a:r>
-                        <a:t>(17) 99148-5455</a:t>
+                        <a:t>(CA) 98877-6655</a:t>
                       </a:r>
                     </a:p>
                   </a:txBody>
@@ -3714,7 +3714,7 @@
                     <a:lstStyle/>
                     <a:p>
                       <a:r>
-                        <a:t>Contato</a:t>
+                        <a:t>Os Melhores Dentistas em </a:t>
                       </a:r>
                     </a:p>
                   </a:txBody>
@@ -3726,7 +3726,7 @@
                     <a:lstStyle/>
                     <a:p>
                       <a:r>
-                        <a:t>SITE ATIVO 📱</a:t>
+                        <a:t>SEM SITE (OPORTUNIDA</a:t>
                       </a:r>
                     </a:p>
                   </a:txBody>
@@ -3738,7 +3738,7 @@
                     <a:lstStyle/>
                     <a:p>
                       <a:r>
-                        <a:t>(11) 95213-7463</a:t>
+                        <a:t>(CA) 98877-6655</a:t>
                       </a:r>
                     </a:p>
                   </a:txBody>
@@ -3764,7 +3764,7 @@
                     <a:lstStyle/>
                     <a:p>
                       <a:r>
-                        <a:t>Ana Carolina Diniz</a:t>
+                        <a:t>Dra Camila Roberta</a:t>
                       </a:r>
                     </a:p>
                   </a:txBody>
@@ -3776,7 +3776,7 @@
                     <a:lstStyle/>
                     <a:p>
                       <a:r>
-                        <a:t>SITE ATIVO 📱</a:t>
+                        <a:t>SEM SITE PRÓPRIO (OP</a:t>
                       </a:r>
                     </a:p>
                   </a:txBody>
@@ -3788,7 +3788,7 @@
                     <a:lstStyle/>
                     <a:p>
                       <a:r>
-                        <a:t>WhatsApp no Maps 📍</a:t>
+                        <a:t>(CA) 98877-6655</a:t>
                       </a:r>
                     </a:p>
                   </a:txBody>

--- a/relatorio_dentista_campinas.pptx
+++ b/relatorio_dentista_campinas.pptx
@@ -3414,7 +3414,7 @@
                     <a:lstStyle/>
                     <a:p>
                       <a:r>
-                        <a:t>Clnica Odontolgica Odonth</a:t>
+                        <a:t>Sculpere Clnica Odontolgi</a:t>
                       </a:r>
                     </a:p>
                   </a:txBody>
@@ -3438,7 +3438,7 @@
                     <a:lstStyle/>
                     <a:p>
                       <a:r>
-                        <a:t>(CA) 98877-6655</a:t>
+                        <a:t>19982555</a:t>
                       </a:r>
                     </a:p>
                   </a:txBody>
@@ -3514,7 +3514,7 @@
                     <a:lstStyle/>
                     <a:p>
                       <a:r>
-                        <a:t>Dentistas em Centro, Camp</a:t>
+                        <a:t>Dentista e Odontologia Es</a:t>
                       </a:r>
                     </a:p>
                   </a:txBody>
@@ -3538,7 +3538,7 @@
                     <a:lstStyle/>
                     <a:p>
                       <a:r>
-                        <a:t>(19) 3326-1410</a:t>
+                        <a:t>(CA) 98877-6655</a:t>
                       </a:r>
                     </a:p>
                   </a:txBody>
@@ -3564,7 +3564,7 @@
                     <a:lstStyle/>
                     <a:p>
                       <a:r>
-                        <a:t>Dentista e Odontologia Es</a:t>
+                        <a:t>Dentista 24 Horas Campina</a:t>
                       </a:r>
                     </a:p>
                   </a:txBody>
@@ -3614,7 +3614,7 @@
                     <a:lstStyle/>
                     <a:p>
                       <a:r>
-                        <a:t>10 melhores dentistas par</a:t>
+                        <a:t>Clnica Odontolgica Odonth</a:t>
                       </a:r>
                     </a:p>
                   </a:txBody>
@@ -3638,7 +3638,7 @@
                     <a:lstStyle/>
                     <a:p>
                       <a:r>
-                        <a:t>(19) 97419-5901</a:t>
+                        <a:t>(CA) 98877-6655</a:t>
                       </a:r>
                     </a:p>
                   </a:txBody>
@@ -3664,7 +3664,7 @@
                     <a:lstStyle/>
                     <a:p>
                       <a:r>
-                        <a:t>Dentista 24 Horas Campina</a:t>
+                        <a:t>Ana Carolina Diniz</a:t>
                       </a:r>
                     </a:p>
                   </a:txBody>
@@ -3688,7 +3688,7 @@
                     <a:lstStyle/>
                     <a:p>
                       <a:r>
-                        <a:t>(CA) 98877-6655</a:t>
+                        <a:t>(19) 98332-9496</a:t>
                       </a:r>
                     </a:p>
                   </a:txBody>
@@ -3714,7 +3714,7 @@
                     <a:lstStyle/>
                     <a:p>
                       <a:r>
-                        <a:t>Os Melhores Dentistas em </a:t>
+                        <a:t>Odontologia Vetorasso</a:t>
                       </a:r>
                     </a:p>
                   </a:txBody>
@@ -3726,7 +3726,7 @@
                     <a:lstStyle/>
                     <a:p>
                       <a:r>
-                        <a:t>SEM SITE (OPORTUNIDA</a:t>
+                        <a:t>SITE ATIVO 📱</a:t>
                       </a:r>
                     </a:p>
                   </a:txBody>
@@ -3764,7 +3764,7 @@
                     <a:lstStyle/>
                     <a:p>
                       <a:r>
-                        <a:t>Dra Camila Roberta</a:t>
+                        <a:t>Odontoclinic Campinas</a:t>
                       </a:r>
                     </a:p>
                   </a:txBody>
@@ -3776,7 +3776,7 @@
                     <a:lstStyle/>
                     <a:p>
                       <a:r>
-                        <a:t>SEM SITE PRÓPRIO (OP</a:t>
+                        <a:t>SITE ATIVO 📱</a:t>
                       </a:r>
                     </a:p>
                   </a:txBody>
@@ -3788,7 +3788,7 @@
                     <a:lstStyle/>
                     <a:p>
                       <a:r>
-                        <a:t>(CA) 98877-6655</a:t>
+                        <a:t>(19) 97122-6504</a:t>
                       </a:r>
                     </a:p>
                   </a:txBody>

--- a/relatorio_dentista_campinas.pptx
+++ b/relatorio_dentista_campinas.pptx
@@ -3314,7 +3314,7 @@
                     <a:lstStyle/>
                     <a:p>
                       <a:r>
-                        <a:t>Dentistas em Campinas</a:t>
+                        <a:t>Dentista 24 Horas Campina</a:t>
                       </a:r>
                     </a:p>
                   </a:txBody>
@@ -3338,7 +3338,7 @@
                     <a:lstStyle/>
                     <a:p>
                       <a:r>
-                        <a:t>(CA) 98877-6655</a:t>
+                        <a:t>(19) 99409-5553</a:t>
                       </a:r>
                     </a:p>
                   </a:txBody>
@@ -3364,7 +3364,7 @@
                     <a:lstStyle/>
                     <a:p>
                       <a:r>
-                        <a:t>Dra. Lvia Sousa, Dentista</a:t>
+                        <a:t>Ana Carolina Diniz</a:t>
                       </a:r>
                     </a:p>
                   </a:txBody>
@@ -3388,7 +3388,7 @@
                     <a:lstStyle/>
                     <a:p>
                       <a:r>
-                        <a:t>(CA) 98877-6655</a:t>
+                        <a:t>(51) 99811-7686</a:t>
                       </a:r>
                     </a:p>
                   </a:txBody>
@@ -3414,7 +3414,7 @@
                     <a:lstStyle/>
                     <a:p>
                       <a:r>
-                        <a:t>Sculpere Clnica Odontolgi</a:t>
+                        <a:t>Dentistas em Campinas: Ac</a:t>
                       </a:r>
                     </a:p>
                   </a:txBody>
@@ -3438,7 +3438,7 @@
                     <a:lstStyle/>
                     <a:p>
                       <a:r>
-                        <a:t>19982555</a:t>
+                        <a:t>(19) 98242-4662</a:t>
                       </a:r>
                     </a:p>
                   </a:txBody>
@@ -3464,7 +3464,7 @@
                     <a:lstStyle/>
                     <a:p>
                       <a:r>
-                        <a:t>Especialista em Implantes</a:t>
+                        <a:t>Campinas</a:t>
                       </a:r>
                     </a:p>
                   </a:txBody>
@@ -3488,7 +3488,7 @@
                     <a:lstStyle/>
                     <a:p>
                       <a:r>
-                        <a:t>(CA) 98877-6655</a:t>
+                        <a:t>(19) 99704-9128</a:t>
                       </a:r>
                     </a:p>
                   </a:txBody>
@@ -3514,7 +3514,7 @@
                     <a:lstStyle/>
                     <a:p>
                       <a:r>
-                        <a:t>Dentista e Odontologia Es</a:t>
+                        <a:t>Consultrio Odontolgico Dr</a:t>
                       </a:r>
                     </a:p>
                   </a:txBody>
@@ -3538,7 +3538,7 @@
                     <a:lstStyle/>
                     <a:p>
                       <a:r>
-                        <a:t>(CA) 98877-6655</a:t>
+                        <a:t>(19) 99176-8765</a:t>
                       </a:r>
                     </a:p>
                   </a:txBody>
@@ -3564,7 +3564,7 @@
                     <a:lstStyle/>
                     <a:p>
                       <a:r>
-                        <a:t>Dentista 24 Horas Campina</a:t>
+                        <a:t>Dra. Nayane Moreno Dentis</a:t>
                       </a:r>
                     </a:p>
                   </a:txBody>
@@ -3588,7 +3588,7 @@
                     <a:lstStyle/>
                     <a:p>
                       <a:r>
-                        <a:t>(CA) 98877-6655</a:t>
+                        <a:t>(79) 99945-2813</a:t>
                       </a:r>
                     </a:p>
                   </a:txBody>
@@ -3614,7 +3614,7 @@
                     <a:lstStyle/>
                     <a:p>
                       <a:r>
-                        <a:t>Clnica Odontolgica Odonth</a:t>
+                        <a:t>Consultorio Odontolgico D</a:t>
                       </a:r>
                     </a:p>
                   </a:txBody>
@@ -3638,7 +3638,7 @@
                     <a:lstStyle/>
                     <a:p>
                       <a:r>
-                        <a:t>(CA) 98877-6655</a:t>
+                        <a:t>(19) 99967-5900</a:t>
                       </a:r>
                     </a:p>
                   </a:txBody>
@@ -3664,7 +3664,7 @@
                     <a:lstStyle/>
                     <a:p>
                       <a:r>
-                        <a:t>Ana Carolina Diniz</a:t>
+                        <a:t>Dentista</a:t>
                       </a:r>
                     </a:p>
                   </a:txBody>
@@ -3688,7 +3688,7 @@
                     <a:lstStyle/>
                     <a:p>
                       <a:r>
-                        <a:t>(19) 98332-9496</a:t>
+                        <a:t>(19) 99409-5553</a:t>
                       </a:r>
                     </a:p>
                   </a:txBody>
@@ -3714,7 +3714,7 @@
                     <a:lstStyle/>
                     <a:p>
                       <a:r>
-                        <a:t>Odontologia Vetorasso</a:t>
+                        <a:t>Clinica Odontologica 24h </a:t>
                       </a:r>
                     </a:p>
                   </a:txBody>
@@ -3738,7 +3738,7 @@
                     <a:lstStyle/>
                     <a:p>
                       <a:r>
-                        <a:t>(CA) 98877-6655</a:t>
+                        <a:t>(85) 91127-0749</a:t>
                       </a:r>
                     </a:p>
                   </a:txBody>
@@ -3764,7 +3764,7 @@
                     <a:lstStyle/>
                     <a:p>
                       <a:r>
-                        <a:t>Odontoclinic Campinas</a:t>
+                        <a:t>Dentista 24 Horas</a:t>
                       </a:r>
                     </a:p>
                   </a:txBody>
@@ -3788,7 +3788,7 @@
                     <a:lstStyle/>
                     <a:p>
                       <a:r>
-                        <a:t>(19) 97122-6504</a:t>
+                        <a:t>(19) 99409-5553</a:t>
                       </a:r>
                     </a:p>
                   </a:txBody>
